--- a/slides/clawops-security.pptx
+++ b/slides/clawops-security.pptx
@@ -3624,7 +3624,7 @@
                 <a:cs typeface="Trebuchet MS"/>
                 <a:sym typeface="Trebuchet MS"/>
               </a:rPr>
-              <a:t>n8n Security</a:t>
+              <a:t>ClawOps Security</a:t>
             </a:r>
             <a:endParaRPr b="0" i="0" sz="5200" u="none" cap="none" strike="noStrike">
               <a:solidFill>
@@ -3687,7 +3687,7 @@
                 <a:cs typeface="Trebuchet MS"/>
                 <a:sym typeface="Trebuchet MS"/>
               </a:rPr>
-              <a:t>Securing Automation Workflows in Production</a:t>
+              <a:t>The AI can LOOK at everything — but CHANGE nothing on its own</a:t>
             </a:r>
             <a:endParaRPr b="0" i="0" sz="1800" u="none" cap="none" strike="noStrike">
               <a:solidFill>
@@ -3829,7 +3829,7 @@
                 <a:cs typeface="Trebuchet MS"/>
                 <a:sym typeface="Trebuchet MS"/>
               </a:rPr>
-              <a:t>1.  Webhook Auth</a:t>
+              <a:t>1.  Read / Write Split</a:t>
             </a:r>
             <a:endParaRPr b="0" i="0" sz="1100" u="none" cap="none" strike="noStrike">
               <a:solidFill>
@@ -3945,7 +3945,7 @@
                 <a:cs typeface="Trebuchet MS"/>
                 <a:sym typeface="Trebuchet MS"/>
               </a:rPr>
-              <a:t>2.  JWT &amp; API Keys</a:t>
+              <a:t>2.  Human Approval Gate</a:t>
             </a:r>
             <a:endParaRPr b="0" i="0" sz="1100" u="none" cap="none" strike="noStrike">
               <a:solidFill>
@@ -4061,7 +4061,7 @@
                 <a:cs typeface="Trebuchet MS"/>
                 <a:sym typeface="Trebuchet MS"/>
               </a:rPr>
-              <a:t>3.  Credential Store</a:t>
+              <a:t>3.  Least-Privilege RBAC</a:t>
             </a:r>
             <a:endParaRPr b="0" i="0" sz="1100" u="none" cap="none" strike="noStrike">
               <a:solidFill>
@@ -4177,7 +4177,7 @@
                 <a:cs typeface="Trebuchet MS"/>
                 <a:sym typeface="Trebuchet MS"/>
               </a:rPr>
-              <a:t>4.  TOTP Write Gate</a:t>
+              <a:t>4.  Audit Trail</a:t>
             </a:r>
             <a:endParaRPr b="0" i="0" sz="1100" u="none" cap="none" strike="noStrike">
               <a:solidFill>
@@ -4293,7 +4293,7 @@
                 <a:cs typeface="Trebuchet MS"/>
                 <a:sym typeface="Trebuchet MS"/>
               </a:rPr>
-              <a:t>5.  Network Isolation</a:t>
+              <a:t>5.  Secrets &amp; JWT</a:t>
             </a:r>
             <a:endParaRPr b="0" i="0" sz="1100" u="none" cap="none" strike="noStrike">
               <a:solidFill>
@@ -4584,7 +4584,7 @@
                 <a:cs typeface="Calibri"/>
                 <a:sym typeface="Calibri"/>
               </a:rPr>
-              <a:t>Automation that can't be exploited, audited, and controlled is not production-ready.</a:t>
+              <a:t>Every write needs a human + a time-boxed TOTP, is scoped to one namespace by RBAC, and is logged.</a:t>
             </a:r>
             <a:endParaRPr b="0" i="0" sz="1100" u="none" cap="none" strike="noStrike">
               <a:solidFill>
@@ -4844,7 +4844,7 @@
                 <a:cs typeface="Consolas"/>
                 <a:sym typeface="Consolas"/>
               </a:rPr>
-              <a:t>SECURITY — TOPIC 1</a:t>
+              <a:t>SECURITY — LAYER 1</a:t>
             </a:r>
             <a:endParaRPr b="0" i="0" sz="1000" u="none" cap="none" strike="noStrike">
               <a:solidFill>
@@ -4907,7 +4907,7 @@
                 <a:cs typeface="Trebuchet MS"/>
                 <a:sym typeface="Trebuchet MS"/>
               </a:rPr>
-              <a:t>Securing Webhook Triggers</a:t>
+              <a:t>Read / Write Split at the MCP</a:t>
             </a:r>
             <a:endParaRPr b="0" i="0" sz="3600" u="none" cap="none" strike="noStrike">
               <a:solidFill>
@@ -5045,7 +5045,7 @@
                 <a:cs typeface="Calibri"/>
                 <a:sym typeface="Calibri"/>
               </a:rPr>
-              <a:t>⚠️  By default, n8n webhook URLs are PUBLIC — anyone who discovers the URL can trigger your workflow</a:t>
+              <a:t>⚠️  The AI Agent reaches the cluster ONLY through the MCP server. The MCP — not the AI — decides what is read vs write.</a:t>
             </a:r>
             <a:endParaRPr b="0" i="0" sz="1100" u="none" cap="none" strike="noStrike">
               <a:solidFill>
@@ -5280,7 +5280,7 @@
                 <a:cs typeface="Trebuchet MS"/>
                 <a:sym typeface="Trebuchet MS"/>
               </a:rPr>
-              <a:t>Header Authentication</a:t>
+              <a:t>kubectl-read  (free)</a:t>
             </a:r>
             <a:endParaRPr b="0" i="0" sz="1100" u="none" cap="none" strike="noStrike">
               <a:solidFill>
@@ -5343,7 +5343,7 @@
                 <a:cs typeface="Consolas"/>
                 <a:sym typeface="Consolas"/>
               </a:rPr>
-              <a:t>n8n UI: Webhook node → Authentication → Header Auth</a:t>
+              <a:t>POST /tools/kubectl-read — get, describe, logs, events, top.</a:t>
             </a:r>
             <a:endParaRPr b="0" i="0" sz="800" u="none" cap="none" strike="noStrike">
               <a:solidFill>
@@ -5380,7 +5380,7 @@
                 <a:cs typeface="Consolas"/>
                 <a:sym typeface="Consolas"/>
               </a:rPr>
-              <a:t>Set: Header Name + Header Value (shared secret)</a:t>
+              <a:t>The AI Agent calls this as often as it likes. No token.</a:t>
             </a:r>
             <a:endParaRPr b="0" i="0" sz="800" u="none" cap="none" strike="noStrike">
               <a:solidFill>
@@ -5492,7 +5492,7 @@
                 <a:cs typeface="Consolas"/>
                 <a:sym typeface="Consolas"/>
               </a:rPr>
-              <a:t>curl -X POST https://ngrok.../webhook/xxx \</a:t>
+              <a:t>POST /tools/kubectl-read  { "command": "get pods -n workshop" }</a:t>
             </a:r>
             <a:endParaRPr b="0" i="0" sz="750" u="none" cap="none" strike="noStrike">
               <a:solidFill>
@@ -5529,7 +5529,7 @@
                 <a:cs typeface="Consolas"/>
                 <a:sym typeface="Consolas"/>
               </a:rPr>
-              <a:t>  -H "X-Webhook-Secret: mysecretvalue123"</a:t>
+              <a:t/>
             </a:r>
             <a:endParaRPr b="0" i="0" sz="750" u="none" cap="none" strike="noStrike">
               <a:solidFill>
@@ -5645,7 +5645,7 @@
                 <a:cs typeface="Calibri"/>
                 <a:sym typeface="Calibri"/>
               </a:rPr>
-              <a:t>💡 Good for Alertmanager — add auth_token in prometheus-values.yaml receivers config</a:t>
+              <a:t>💡 is_write_command() rejects write verbs here with HTTP 403 — read can never mutate.</a:t>
             </a:r>
             <a:endParaRPr b="0" i="0" sz="750" u="none" cap="none" strike="noStrike">
               <a:solidFill>
@@ -5880,7 +5880,7 @@
                 <a:cs typeface="Trebuchet MS"/>
                 <a:sym typeface="Trebuchet MS"/>
               </a:rPr>
-              <a:t>Basic Auth</a:t>
+              <a:t>promql  (free)</a:t>
             </a:r>
             <a:endParaRPr b="0" i="0" sz="1100" u="none" cap="none" strike="noStrike">
               <a:solidFill>
@@ -5943,7 +5943,7 @@
                 <a:cs typeface="Consolas"/>
                 <a:sym typeface="Consolas"/>
               </a:rPr>
-              <a:t>n8n UI: Webhook node → Authentication → Basic Auth</a:t>
+              <a:t>POST /tools/promql — any PromQL query against Prometheus.</a:t>
             </a:r>
             <a:endParaRPr b="0" i="0" sz="800" u="none" cap="none" strike="noStrike">
               <a:solidFill>
@@ -5980,7 +5980,7 @@
                 <a:cs typeface="Consolas"/>
                 <a:sym typeface="Consolas"/>
               </a:rPr>
-              <a:t>Set: Username + Password</a:t>
+              <a:t>Live metrics for the investigation. No token.</a:t>
             </a:r>
             <a:endParaRPr b="0" i="0" sz="800" u="none" cap="none" strike="noStrike">
               <a:solidFill>
@@ -6092,7 +6092,7 @@
                 <a:cs typeface="Consolas"/>
                 <a:sym typeface="Consolas"/>
               </a:rPr>
-              <a:t>curl -X POST https://ngrok.../webhook/xxx \</a:t>
+              <a:t>POST /tools/promql  { "query": "target_chaos_cpu_active" }</a:t>
             </a:r>
             <a:endParaRPr b="0" i="0" sz="750" u="none" cap="none" strike="noStrike">
               <a:solidFill>
@@ -6129,7 +6129,7 @@
                 <a:cs typeface="Consolas"/>
                 <a:sym typeface="Consolas"/>
               </a:rPr>
-              <a:t>  -u "admin:password123"</a:t>
+              <a:t/>
             </a:r>
             <a:endParaRPr b="0" i="0" sz="750" u="none" cap="none" strike="noStrike">
               <a:solidFill>
@@ -6245,7 +6245,7 @@
                 <a:cs typeface="Calibri"/>
                 <a:sym typeface="Calibri"/>
               </a:rPr>
-              <a:t>💡 Simpler but password in base64 only — not encrypted unless HTTPS</a:t>
+              <a:t>💡 Read tools give the AI total visibility — that is the point. Looking is cheap; changing is gated.</a:t>
             </a:r>
             <a:endParaRPr b="0" i="0" sz="750" u="none" cap="none" strike="noStrike">
               <a:solidFill>
@@ -6533,7 +6533,7 @@
                 <a:cs typeface="Trebuchet MS"/>
                 <a:sym typeface="Trebuchet MS"/>
               </a:rPr>
-              <a:t>★ BEST</a:t>
+              <a:t>★ THE GATE</a:t>
             </a:r>
             <a:endParaRPr b="0" i="0" sz="800" u="none" cap="none" strike="noStrike">
               <a:solidFill>
@@ -6596,7 +6596,7 @@
                 <a:cs typeface="Trebuchet MS"/>
                 <a:sym typeface="Trebuchet MS"/>
               </a:rPr>
-              <a:t>JWT Verification</a:t>
+              <a:t>kubectl-write  (GATED)</a:t>
             </a:r>
             <a:endParaRPr b="0" i="0" sz="1100" u="none" cap="none" strike="noStrike">
               <a:solidFill>
@@ -6659,7 +6659,7 @@
                 <a:cs typeface="Consolas"/>
                 <a:sym typeface="Consolas"/>
               </a:rPr>
-              <a:t>n8n UI: Webhook node → Authentication → JWT Auth</a:t>
+              <a:t>POST /tools/kubectl-write — requires approval_token + approved_by.</a:t>
             </a:r>
             <a:endParaRPr b="0" i="0" sz="800" u="none" cap="none" strike="noStrike">
               <a:solidFill>
@@ -6696,7 +6696,7 @@
                 <a:cs typeface="Consolas"/>
                 <a:sym typeface="Consolas"/>
               </a:rPr>
-              <a:t>Set: Secret + Algorithm (HS256)</a:t>
+              <a:t>No valid TOTP → HTTP 403, nothing runs.</a:t>
             </a:r>
             <a:endParaRPr b="0" i="0" sz="800" u="none" cap="none" strike="noStrike">
               <a:solidFill>
@@ -6808,7 +6808,7 @@
                 <a:cs typeface="Consolas"/>
                 <a:sym typeface="Consolas"/>
               </a:rPr>
-              <a:t># Caller generates JWT signed with shared secret</a:t>
+              <a:t>WRITE_VERBS = delete apply create replace patch run rollout</a:t>
             </a:r>
             <a:endParaRPr b="0" i="0" sz="750" u="none" cap="none" strike="noStrike">
               <a:solidFill>
@@ -6845,7 +6845,7 @@
                 <a:cs typeface="Consolas"/>
                 <a:sym typeface="Consolas"/>
               </a:rPr>
-              <a:t># n8n validates signature + expiry automatically</a:t>
+              <a:t>            scale cordon drain taint label annotate exec</a:t>
             </a:r>
             <a:endParaRPr b="0" i="0" sz="750" u="none" cap="none" strike="noStrike">
               <a:solidFill>
@@ -6961,7 +6961,7 @@
                 <a:cs typeface="Calibri"/>
                 <a:sym typeface="Calibri"/>
               </a:rPr>
-              <a:t>💡 Best for service-to-service. Expiry built-in. Signature prevents tampering.</a:t>
+              <a:t>💡 The AI Agent never calls this. Only the Human Approval workflow does, after a human types a TOTP.</a:t>
             </a:r>
             <a:endParaRPr b="0" i="0" sz="750" u="none" cap="none" strike="noStrike">
               <a:solidFill>
@@ -7196,7 +7196,7 @@
                 <a:cs typeface="Trebuchet MS"/>
                 <a:sym typeface="Trebuchet MS"/>
               </a:rPr>
-              <a:t>HTTPS via ngrok (our setup)</a:t>
+              <a:t>Verb allowlist enforced</a:t>
             </a:r>
             <a:endParaRPr b="0" i="0" sz="1100" u="none" cap="none" strike="noStrike">
               <a:solidFill>
@@ -7259,7 +7259,7 @@
                 <a:cs typeface="Consolas"/>
                 <a:sym typeface="Consolas"/>
               </a:rPr>
-              <a:t>ngrok provides TLS termination — all traffic encrypted in transit</a:t>
+              <a:t>is_write_command() checks the first word against WRITE_VERBS.</a:t>
             </a:r>
             <a:endParaRPr b="0" i="0" sz="800" u="none" cap="none" strike="noStrike">
               <a:solidFill>
@@ -7296,7 +7296,7 @@
                 <a:cs typeface="Consolas"/>
                 <a:sym typeface="Consolas"/>
               </a:rPr>
-              <a:t>Telegram REQUIRES HTTPS — plain HTTP rejected</a:t>
+              <a:t>A write verb on /kubectl-read → 403. A non-write on</a:t>
             </a:r>
             <a:endParaRPr b="0" i="0" sz="800" u="none" cap="none" strike="noStrike">
               <a:solidFill>
@@ -7307,6 +7307,20 @@
               <a:cs typeface="Calibri"/>
               <a:sym typeface="Calibri"/>
             </a:endParaRPr>
+          </a:p>
+          <a:p>
+            <a:r>
+              <a:rPr b="0" i="0" lang="en-US" sz="800" u="none" cap="none" strike="noStrike">
+                <a:solidFill>
+                  <a:srgbClr val="8892A4"/>
+                </a:solidFill>
+                <a:latin typeface="Consolas"/>
+                <a:ea typeface="Consolas"/>
+                <a:cs typeface="Consolas"/>
+                <a:sym typeface="Consolas"/>
+              </a:rPr>
+              <a:t>/kubectl-write → 400 "Not a write command".</a:t>
+            </a:r>
           </a:p>
         </p:txBody>
       </p:sp>
@@ -7408,7 +7422,7 @@
                 <a:cs typeface="Consolas"/>
                 <a:sym typeface="Consolas"/>
               </a:rPr>
-              <a:t>ngrok http 5678 --domain=your-static.ngrok-free.app</a:t>
+              <a:t>first_word = command.strip().split()[0].lower()</a:t>
             </a:r>
             <a:endParaRPr b="0" i="0" sz="750" u="none" cap="none" strike="noStrike">
               <a:solidFill>
@@ -7445,7 +7459,7 @@
                 <a:cs typeface="Consolas"/>
                 <a:sym typeface="Consolas"/>
               </a:rPr>
-              <a:t># → https://your-static.ngrok-free.app/webhook/...</a:t>
+              <a:t>if first_word in WRITE_VERBS:  # gated path only</a:t>
             </a:r>
             <a:endParaRPr b="0" i="0" sz="750" u="none" cap="none" strike="noStrike">
               <a:solidFill>
@@ -7561,7 +7575,7 @@
                 <a:cs typeface="Calibri"/>
                 <a:sym typeface="Calibri"/>
               </a:rPr>
-              <a:t>💡 Never expose n8n:5678 directly to internet — always proxy through HTTPS</a:t>
+              <a:t>💡 The split is enforced in code (mcp-server/server.py), not by convention.</a:t>
             </a:r>
             <a:endParaRPr b="0" i="0" sz="750" u="none" cap="none" strike="noStrike">
               <a:solidFill>
@@ -7705,7 +7719,7 @@
                 <a:cs typeface="Consolas"/>
                 <a:sym typeface="Consolas"/>
               </a:rPr>
-              <a:t>SECURITY — TOPIC 2</a:t>
+              <a:t>SECURITY — LAYER 2</a:t>
             </a:r>
             <a:endParaRPr b="0" i="0" sz="1000" u="none" cap="none" strike="noStrike">
               <a:solidFill>
@@ -7768,7 +7782,7 @@
                 <a:cs typeface="Trebuchet MS"/>
                 <a:sym typeface="Trebuchet MS"/>
               </a:rPr>
-              <a:t>JWT &amp; API Authentication</a:t>
+              <a:t>The Human Approval Gate (TOTP)</a:t>
             </a:r>
             <a:endParaRPr b="0" i="0" sz="3600" u="none" cap="none" strike="noStrike">
               <a:solidFill>
@@ -7962,7 +7976,7 @@
                 <a:cs typeface="Trebuchet MS"/>
                 <a:sym typeface="Trebuchet MS"/>
               </a:rPr>
-              <a:t>🔑  N8N API KEY (JWT)</a:t>
+              <a:t>🔐  TOTP VALIDATED AT THE MCP</a:t>
             </a:r>
             <a:endParaRPr b="0" i="0" sz="1100" u="none" cap="none" strike="noStrike">
               <a:solidFill>
@@ -8025,7 +8039,7 @@
                 <a:cs typeface="Trebuchet MS"/>
                 <a:sym typeface="Trebuchet MS"/>
               </a:rPr>
-              <a:t>What it is:</a:t>
+              <a:t>Recommend:</a:t>
             </a:r>
             <a:endParaRPr b="0" i="0" sz="900" u="none" cap="none" strike="noStrike">
               <a:solidFill>
@@ -8088,7 +8102,7 @@
                 <a:cs typeface="Calibri"/>
                 <a:sym typeface="Calibri"/>
               </a:rPr>
-              <a:t>JWT signed by n8n — used to call n8n's REST API (/api/v1/workflows etc.)</a:t>
+              <a:t>Alert Intelligence (S5) writes an SRE_ACTION to chat — it NEVER executes.</a:t>
             </a:r>
             <a:endParaRPr b="0" i="0" sz="900" u="none" cap="none" strike="noStrike">
               <a:solidFill>
@@ -8151,7 +8165,7 @@
                 <a:cs typeface="Trebuchet MS"/>
                 <a:sym typeface="Trebuchet MS"/>
               </a:rPr>
-              <a:t>Generate:</a:t>
+              <a:t>Approve:</a:t>
             </a:r>
             <a:endParaRPr b="0" i="0" sz="900" u="none" cap="none" strike="noStrike">
               <a:solidFill>
@@ -8214,7 +8228,7 @@
                 <a:cs typeface="Calibri"/>
                 <a:sym typeface="Calibri"/>
               </a:rPr>
-              <a:t>n8n UI → Settings → API → Create API Key</a:t>
+              <a:t>A human types  /approve &lt;6-digit-totp&gt; &lt;incident-key&gt;  in dashboard chat.</a:t>
             </a:r>
             <a:endParaRPr b="0" i="0" sz="900" u="none" cap="none" strike="noStrike">
               <a:solidFill>
@@ -8277,7 +8291,7 @@
                 <a:cs typeface="Trebuchet MS"/>
                 <a:sym typeface="Trebuchet MS"/>
               </a:rPr>
-              <a:t>Use:</a:t>
+              <a:t>Validate:</a:t>
             </a:r>
             <a:endParaRPr b="0" i="0" sz="900" u="none" cap="none" strike="noStrike">
               <a:solidFill>
@@ -8340,7 +8354,7 @@
                 <a:cs typeface="Calibri"/>
                 <a:sym typeface="Calibri"/>
               </a:rPr>
-              <a:t>Header: X-N8N-API-KEY: &lt;token&gt;</a:t>
+              <a:t>Human Approval (S4) sends the code to MCP → pyotp verifies it.</a:t>
             </a:r>
             <a:endParaRPr b="0" i="0" sz="900" u="none" cap="none" strike="noStrike">
               <a:solidFill>
@@ -8403,7 +8417,7 @@
                 <a:cs typeface="Trebuchet MS"/>
                 <a:sym typeface="Trebuchet MS"/>
               </a:rPr>
-              <a:t>Expiry:</a:t>
+              <a:t>Window:</a:t>
             </a:r>
             <a:endParaRPr b="0" i="0" sz="900" u="none" cap="none" strike="noStrike">
               <a:solidFill>
@@ -8466,7 +8480,7 @@
                 <a:cs typeface="Calibri"/>
                 <a:sym typeface="Calibri"/>
               </a:rPr>
-              <a:t>Set expiry date — rotate regularly in prod</a:t>
+              <a:t>totp.verify(code, valid_window=1) — ±30s only. Stale code → rejected.</a:t>
             </a:r>
             <a:endParaRPr b="0" i="0" sz="900" u="none" cap="none" strike="noStrike">
               <a:solidFill>
@@ -8529,7 +8543,7 @@
                 <a:cs typeface="Trebuchet MS"/>
                 <a:sym typeface="Trebuchet MS"/>
               </a:rPr>
-              <a:t>Scope:</a:t>
+              <a:t>Execute:</a:t>
             </a:r>
             <a:endParaRPr b="0" i="0" sz="900" u="none" cap="none" strike="noStrike">
               <a:solidFill>
@@ -8592,7 +8606,7 @@
                 <a:cs typeface="Calibri"/>
                 <a:sym typeface="Calibri"/>
               </a:rPr>
-              <a:t>Full API access — treat like a root password</a:t>
+              <a:t>Only on a valid TOTP does kubectl-write run, then incident → resolved.</a:t>
             </a:r>
             <a:endParaRPr b="0" i="0" sz="900" u="none" cap="none" strike="noStrike">
               <a:solidFill>
@@ -8655,7 +8669,7 @@
                 <a:cs typeface="Trebuchet MS"/>
                 <a:sym typeface="Trebuchet MS"/>
               </a:rPr>
-              <a:t>In .env:</a:t>
+              <a:t>Replay:</a:t>
             </a:r>
             <a:endParaRPr b="0" i="0" sz="900" u="none" cap="none" strike="noStrike">
               <a:solidFill>
@@ -8718,7 +8732,7 @@
                 <a:cs typeface="Calibri"/>
                 <a:sym typeface="Calibri"/>
               </a:rPr>
-              <a:t>Never commit — load via environment variable</a:t>
+              <a:t>A used / expired code fails — codes are time-boxed, not reusable.</a:t>
             </a:r>
             <a:endParaRPr b="0" i="0" sz="900" u="none" cap="none" strike="noStrike">
               <a:solidFill>
@@ -8830,7 +8844,7 @@
                 <a:cs typeface="Consolas"/>
                 <a:sym typeface="Consolas"/>
               </a:rPr>
-              <a:t>curl -H "X-N8N-API-KEY: $N8N_KEY" http://localhost:5678/api/v1/workflows</a:t>
+              <a:t>if pyotp.TOTP(TOTP_SECRET).verify(supplied, valid_window=1): allow_write()</a:t>
             </a:r>
             <a:endParaRPr b="0" i="0" sz="750" u="none" cap="none" strike="noStrike">
               <a:solidFill>
@@ -8998,7 +9012,7 @@
                 <a:cs typeface="Trebuchet MS"/>
                 <a:sym typeface="Trebuchet MS"/>
               </a:rPr>
-              <a:t>🔒  JWT IN WORKFLOW NODES</a:t>
+              <a:t>🛡️  WHY THE GATE HOLDS</a:t>
             </a:r>
             <a:endParaRPr b="0" i="0" sz="1100" u="none" cap="none" strike="noStrike">
               <a:solidFill>
@@ -9124,7 +9138,7 @@
                 <a:cs typeface="Trebuchet MS"/>
                 <a:sym typeface="Trebuchet MS"/>
               </a:rPr>
-              <a:t>Calling secured APIs</a:t>
+              <a:t>AI proposes, human disposes</a:t>
             </a:r>
             <a:endParaRPr b="0" i="0" sz="1000" u="none" cap="none" strike="noStrike">
               <a:solidFill>
@@ -9187,7 +9201,7 @@
                 <a:cs typeface="Calibri"/>
                 <a:sym typeface="Calibri"/>
               </a:rPr>
-              <a:t>HTTP Request node → Authentication → Bearer Token</a:t>
+              <a:t>The AI Agent has no write tool. It can only recommend a command</a:t>
             </a:r>
             <a:endParaRPr b="0" i="0" sz="850" u="none" cap="none" strike="noStrike">
               <a:solidFill>
@@ -9224,7 +9238,7 @@
                 <a:cs typeface="Calibri"/>
                 <a:sym typeface="Calibri"/>
               </a:rPr>
-              <a:t>Store token in n8n credential, not in node params</a:t>
+              <a:t>in chat — a person must approve it.</a:t>
             </a:r>
             <a:endParaRPr b="0" i="0" sz="850" u="none" cap="none" strike="noStrike">
               <a:solidFill>
@@ -9350,7 +9364,7 @@
                 <a:cs typeface="Trebuchet MS"/>
                 <a:sym typeface="Trebuchet MS"/>
               </a:rPr>
-              <a:t>MCP Server auth (future)</a:t>
+              <a:t>TOTP, not a password</a:t>
             </a:r>
             <a:endParaRPr b="0" i="0" sz="1000" u="none" cap="none" strike="noStrike">
               <a:solidFill>
@@ -9413,7 +9427,7 @@
                 <a:cs typeface="Calibri"/>
                 <a:sym typeface="Calibri"/>
               </a:rPr>
-              <a:t>Add JWT middleware to FastAPI MCP</a:t>
+              <a:t>6-digit code from any TOTP app (Google Authenticator, Authy, 1Password).</a:t>
             </a:r>
             <a:endParaRPr b="0" i="0" sz="850" u="none" cap="none" strike="noStrike">
               <a:solidFill>
@@ -9450,7 +9464,7 @@
                 <a:cs typeface="Calibri"/>
                 <a:sym typeface="Calibri"/>
               </a:rPr>
-              <a:t>Verify token before executing kubectl-write</a:t>
+              <a:t>Rotates every 30s — intercepting chat gives an attacker nothing usable.</a:t>
             </a:r>
             <a:endParaRPr b="0" i="0" sz="850" u="none" cap="none" strike="noStrike">
               <a:solidFill>
@@ -9576,7 +9590,7 @@
                 <a:cs typeface="Trebuchet MS"/>
                 <a:sym typeface="Trebuchet MS"/>
               </a:rPr>
-              <a:t>Webhook-to-webhook</a:t>
+              <a:t>Bound to one incident</a:t>
             </a:r>
             <a:endParaRPr b="0" i="0" sz="1000" u="none" cap="none" strike="noStrike">
               <a:solidFill>
@@ -9639,7 +9653,7 @@
                 <a:cs typeface="Calibri"/>
                 <a:sym typeface="Calibri"/>
               </a:rPr>
-              <a:t>Sign outgoing webhooks from n8n using JWT node</a:t>
+              <a:t>The 4-char incident key ties the approval to ONE recommended command.</a:t>
             </a:r>
             <a:endParaRPr b="0" i="0" sz="850" u="none" cap="none" strike="noStrike">
               <a:solidFill>
@@ -9676,7 +9690,7 @@
                 <a:cs typeface="Calibri"/>
                 <a:sym typeface="Calibri"/>
               </a:rPr>
-              <a:t>Receiving service validates signature + expiry</a:t>
+              <a:t>Approving k42a cannot run the command from bgy4.</a:t>
             </a:r>
             <a:endParaRPr b="0" i="0" sz="850" u="none" cap="none" strike="noStrike">
               <a:solidFill>
@@ -9802,7 +9816,7 @@
                 <a:cs typeface="Trebuchet MS"/>
                 <a:sym typeface="Trebuchet MS"/>
               </a:rPr>
-              <a:t>Token expiry handling</a:t>
+              <a:t>Fallback is config-only</a:t>
             </a:r>
             <a:endParaRPr b="0" i="0" sz="1000" u="none" cap="none" strike="noStrike">
               <a:solidFill>
@@ -9865,7 +9879,7 @@
                 <a:cs typeface="Calibri"/>
                 <a:sym typeface="Calibri"/>
               </a:rPr>
-              <a:t>Short-lived tokens (15min) + refresh pattern</a:t>
+              <a:t>A static WRITE_APPROVAL_TOKEN exists only as a fallback when no</a:t>
             </a:r>
             <a:endParaRPr b="0" i="0" sz="850" u="none" cap="none" strike="noStrike">
               <a:solidFill>
@@ -9902,7 +9916,7 @@
                 <a:cs typeface="Calibri"/>
                 <a:sym typeface="Calibri"/>
               </a:rPr>
-              <a:t>Better than static tokens that never expire</a:t>
+              <a:t>TOTP_SECRET is set. In the workshop TOTP is configured, so TOTP wins.</a:t>
             </a:r>
             <a:endParaRPr b="0" i="0" sz="850" u="none" cap="none" strike="noStrike">
               <a:solidFill>
@@ -10046,7 +10060,7 @@
                 <a:cs typeface="Consolas"/>
                 <a:sym typeface="Consolas"/>
               </a:rPr>
-              <a:t>SECURITY — TOPIC 3</a:t>
+              <a:t>SECURITY — LAYER 3</a:t>
             </a:r>
             <a:endParaRPr b="0" i="0" sz="1000" u="none" cap="none" strike="noStrike">
               <a:solidFill>
@@ -10109,7 +10123,7 @@
                 <a:cs typeface="Trebuchet MS"/>
                 <a:sym typeface="Trebuchet MS"/>
               </a:rPr>
-              <a:t>Credential Management</a:t>
+              <a:t>Least-Privilege RBAC</a:t>
             </a:r>
             <a:endParaRPr b="0" i="0" sz="3600" u="none" cap="none" strike="noStrike">
               <a:solidFill>
@@ -10310,7 +10324,7 @@
                 <a:cs typeface="Calibri"/>
                 <a:sym typeface="Calibri"/>
               </a:rPr>
-              <a:t>n8n encrypts all credentials at rest using AES-256. Key = N8N_ENCRYPTION_KEY in .env</a:t>
+              <a:t>The MCP server authenticates with an in-cluster ServiceAccount (mcp-server in clawops) — NO kubeconfig, no static cluster credentials on disk.</a:t>
             </a:r>
             <a:endParaRPr b="0" i="0" sz="1100" u="none" cap="none" strike="noStrike">
               <a:solidFill>
@@ -10422,7 +10436,7 @@
                 <a:cs typeface="Consolas"/>
                 <a:sym typeface="Consolas"/>
               </a:rPr>
-              <a:t>N8N_ENCRYPTION_KEY=&lt;32-char-random&gt;</a:t>
+              <a:t>serviceAccount: mcp-server</a:t>
             </a:r>
             <a:endParaRPr b="0" i="0" sz="800" u="none" cap="none" strike="noStrike">
               <a:solidFill>
@@ -10594,7 +10608,7 @@
                 <a:cs typeface="Trebuchet MS"/>
                 <a:sym typeface="Trebuchet MS"/>
               </a:rPr>
-              <a:t>✅  DO — Store in n8n</a:t>
+              <a:t>✅  CAN READ — cluster-wide</a:t>
             </a:r>
             <a:endParaRPr b="0" i="0" sz="1000" u="none" cap="none" strike="noStrike">
               <a:solidFill>
@@ -10657,7 +10671,7 @@
                 <a:cs typeface="Calibri"/>
                 <a:sym typeface="Calibri"/>
               </a:rPr>
-              <a:t>✓  API keys (Gemini, Telegram)</a:t>
+              <a:t>✓  pods, pods/log, pods/exec</a:t>
             </a:r>
             <a:endParaRPr b="0" i="0" sz="1000" u="none" cap="none" strike="noStrike">
               <a:solidFill>
@@ -10720,7 +10734,7 @@
                 <a:cs typeface="Calibri"/>
                 <a:sym typeface="Calibri"/>
               </a:rPr>
-              <a:t>✓  OAuth tokens</a:t>
+              <a:t>✓  services, endpoints, nodes</a:t>
             </a:r>
             <a:endParaRPr b="0" i="0" sz="1000" u="none" cap="none" strike="noStrike">
               <a:solidFill>
@@ -10783,7 +10797,7 @@
                 <a:cs typeface="Calibri"/>
                 <a:sym typeface="Calibri"/>
               </a:rPr>
-              <a:t>✓  Webhook secrets</a:t>
+              <a:t>✓  namespaces, events, configmaps</a:t>
             </a:r>
             <a:endParaRPr b="0" i="0" sz="1000" u="none" cap="none" strike="noStrike">
               <a:solidFill>
@@ -10846,7 +10860,7 @@
                 <a:cs typeface="Calibri"/>
                 <a:sym typeface="Calibri"/>
               </a:rPr>
-              <a:t>✓  Database passwords</a:t>
+              <a:t>✓  deployments, replicasets, statefulsets</a:t>
             </a:r>
             <a:endParaRPr b="0" i="0" sz="1000" u="none" cap="none" strike="noStrike">
               <a:solidFill>
@@ -10909,7 +10923,7 @@
                 <a:cs typeface="Calibri"/>
                 <a:sym typeface="Calibri"/>
               </a:rPr>
-              <a:t>✓  SSH private keys</a:t>
+              <a:t>✓  metrics (pods, nodes)</a:t>
             </a:r>
             <a:endParaRPr b="0" i="0" sz="1000" u="none" cap="none" strike="noStrike">
               <a:solidFill>
@@ -11025,7 +11039,7 @@
                 <a:cs typeface="Calibri"/>
                 <a:sym typeface="Calibri"/>
               </a:rPr>
-              <a:t>Encrypted, not exported with workflows, role-based access in n8n Enterprise</a:t>
+              <a:t>verbs: get, list, watch only. The AI can see everything, everywhere — read access is broad on purpose.</a:t>
             </a:r>
             <a:endParaRPr b="0" i="0" sz="750" u="none" cap="none" strike="noStrike">
               <a:solidFill>
@@ -11197,7 +11211,7 @@
                 <a:cs typeface="Trebuchet MS"/>
                 <a:sym typeface="Trebuchet MS"/>
               </a:rPr>
-              <a:t>✅  DO — Use .env file</a:t>
+              <a:t>🔒  CAN WRITE — narrow verbs</a:t>
             </a:r>
             <a:endParaRPr b="0" i="0" sz="1000" u="none" cap="none" strike="noStrike">
               <a:solidFill>
@@ -11260,7 +11274,7 @@
                 <a:cs typeface="Calibri"/>
                 <a:sym typeface="Calibri"/>
               </a:rPr>
-              <a:t>✓  EC2_PUBLIC_IP</a:t>
+              <a:t>✓  deployments: patch, update</a:t>
             </a:r>
             <a:endParaRPr b="0" i="0" sz="1000" u="none" cap="none" strike="noStrike">
               <a:solidFill>
@@ -11323,7 +11337,7 @@
                 <a:cs typeface="Calibri"/>
                 <a:sym typeface="Calibri"/>
               </a:rPr>
-              <a:t>✓  PROMETHEUS_URL, GRAFANA_URL</a:t>
+              <a:t>✓  pods: delete (restart a pod)</a:t>
             </a:r>
             <a:endParaRPr b="0" i="0" sz="1000" u="none" cap="none" strike="noStrike">
               <a:solidFill>
@@ -11386,7 +11400,7 @@
                 <a:cs typeface="Calibri"/>
                 <a:sym typeface="Calibri"/>
               </a:rPr>
-              <a:t>✓  TOTP_SECRET</a:t>
+              <a:t>✗  no create / no namespaces</a:t>
             </a:r>
             <a:endParaRPr b="0" i="0" sz="1000" u="none" cap="none" strike="noStrike">
               <a:solidFill>
@@ -11449,7 +11463,7 @@
                 <a:cs typeface="Calibri"/>
                 <a:sym typeface="Calibri"/>
               </a:rPr>
-              <a:t>✓  N8N_PASSWORD</a:t>
+              <a:t>✗  no secrets / no RBAC objects</a:t>
             </a:r>
             <a:endParaRPr b="0" i="0" sz="1000" u="none" cap="none" strike="noStrike">
               <a:solidFill>
@@ -11512,7 +11526,7 @@
                 <a:cs typeface="Calibri"/>
                 <a:sym typeface="Calibri"/>
               </a:rPr>
-              <a:t>✓  WRITE_APPROVAL_TOKEN</a:t>
+              <a:t>✗  no nodes / no cluster config</a:t>
             </a:r>
             <a:endParaRPr b="0" i="0" sz="1000" u="none" cap="none" strike="noStrike">
               <a:solidFill>
@@ -11628,7 +11642,7 @@
                 <a:cs typeface="Calibri"/>
                 <a:sym typeface="Calibri"/>
               </a:rPr>
-              <a:t>Never commit .env to git. Add to .gitignore. Generate CREDENTIALS.md for reference only.</a:t>
+              <a:t>Write is exactly two verbs on two resources (k8s/clawops/mcp-server/rbac.yaml) — enough for the chaos fixes, nothing more.</a:t>
             </a:r>
             <a:endParaRPr b="0" i="0" sz="750" u="none" cap="none" strike="noStrike">
               <a:solidFill>
@@ -11800,7 +11814,7 @@
                 <a:cs typeface="Trebuchet MS"/>
                 <a:sym typeface="Trebuchet MS"/>
               </a:rPr>
-              <a:t>❌  NEVER DO</a:t>
+              <a:t>🎯  WHY IT MATTERS</a:t>
             </a:r>
             <a:endParaRPr b="0" i="0" sz="1000" u="none" cap="none" strike="noStrike">
               <a:solidFill>
@@ -11863,7 +11877,7 @@
                 <a:cs typeface="Calibri"/>
                 <a:sym typeface="Calibri"/>
               </a:rPr>
-              <a:t>✗  Hardcode secrets in nodes</a:t>
+              <a:t>↳  Two gates, not one</a:t>
             </a:r>
             <a:endParaRPr b="0" i="0" sz="1000" u="none" cap="none" strike="noStrike">
               <a:solidFill>
@@ -11926,7 +11940,7 @@
                 <a:cs typeface="Calibri"/>
                 <a:sym typeface="Calibri"/>
               </a:rPr>
-              <a:t>✗  Store in workflow JSON</a:t>
+              <a:t>↳  TOTP says WHO may write</a:t>
             </a:r>
             <a:endParaRPr b="0" i="0" sz="1000" u="none" cap="none" strike="noStrike">
               <a:solidFill>
@@ -11989,7 +12003,7 @@
                 <a:cs typeface="Calibri"/>
                 <a:sym typeface="Calibri"/>
               </a:rPr>
-              <a:t>✗  Commit to git repo</a:t>
+              <a:t>↳  RBAC says WHAT can be written</a:t>
             </a:r>
             <a:endParaRPr b="0" i="0" sz="1000" u="none" cap="none" strike="noStrike">
               <a:solidFill>
@@ -12052,7 +12066,7 @@
                 <a:cs typeface="Calibri"/>
                 <a:sym typeface="Calibri"/>
               </a:rPr>
-              <a:t>✗  Log in execution history</a:t>
+              <a:t>↳  A leaked TOTP still hits RBAC</a:t>
             </a:r>
             <a:endParaRPr b="0" i="0" sz="1000" u="none" cap="none" strike="noStrike">
               <a:solidFill>
@@ -12115,7 +12129,7 @@
                 <a:cs typeface="Calibri"/>
                 <a:sym typeface="Calibri"/>
               </a:rPr>
-              <a:t>✗  Share via Telegram/Slack</a:t>
+              <a:t>↳  Workshop fixes = restart / scale</a:t>
             </a:r>
             <a:endParaRPr b="0" i="0" sz="1000" u="none" cap="none" strike="noStrike">
               <a:solidFill>
@@ -12231,7 +12245,7 @@
                 <a:cs typeface="Calibri"/>
                 <a:sym typeface="Calibri"/>
               </a:rPr>
-              <a:t>When you export a workflow JSON — credentials are NOT exported. Only credential IDs.</a:t>
+              <a:t>Even with a valid token, the SA simply has no permission to delete a namespace or read a Secret. Defense in depth.</a:t>
             </a:r>
             <a:endParaRPr b="0" i="0" sz="750" u="none" cap="none" strike="noStrike">
               <a:solidFill>
@@ -12375,7 +12389,7 @@
                 <a:cs typeface="Consolas"/>
                 <a:sym typeface="Consolas"/>
               </a:rPr>
-              <a:t>SECURITY — TOPIC 4</a:t>
+              <a:t>SECURITY — LAYER 4</a:t>
             </a:r>
             <a:endParaRPr b="0" i="0" sz="1000" u="none" cap="none" strike="noStrike">
               <a:solidFill>
@@ -12438,7 +12452,7 @@
                 <a:cs typeface="Trebuchet MS"/>
                 <a:sym typeface="Trebuchet MS"/>
               </a:rPr>
-              <a:t>TOTP as a Write Gate — Our Pattern</a:t>
+              <a:t>Audit Trail — Every Write Is Logged</a:t>
             </a:r>
             <a:endParaRPr b="0" i="0" sz="3600" u="none" cap="none" strike="noStrike">
               <a:solidFill>
@@ -13625,7 +13639,7 @@
                 <a:cs typeface="Calibri"/>
                 <a:sym typeface="Calibri"/>
               </a:rPr>
-              <a:t>✉️</a:t>
+              <a:t>💬</a:t>
             </a:r>
             <a:endParaRPr b="0" i="0" sz="2000" u="none" cap="none" strike="noStrike">
               <a:solidFill>
@@ -13688,7 +13702,7 @@
                 <a:cs typeface="Trebuchet MS"/>
                 <a:sym typeface="Trebuchet MS"/>
               </a:rPr>
-              <a:t>Telegram</a:t>
+              <a:t>Dashboard</a:t>
             </a:r>
             <a:endParaRPr b="0" i="0" sz="800" u="none" cap="none" strike="noStrike">
               <a:solidFill>
@@ -13725,7 +13739,7 @@
                 <a:cs typeface="Trebuchet MS"/>
                 <a:sym typeface="Trebuchet MS"/>
               </a:rPr>
-              <a:t>message</a:t>
+              <a:t>chat</a:t>
             </a:r>
             <a:endParaRPr b="0" i="0" sz="800" u="none" cap="none" strike="noStrike">
               <a:solidFill>
@@ -15294,7 +15308,7 @@
                 <a:cs typeface="Calibri"/>
                 <a:sym typeface="Calibri"/>
               </a:rPr>
-              <a:t>TOTP codes expire in 30 seconds — replay attacks useless. Intercepting the Telegram message gives attackers nothing.</a:t>
+              <a:t>TOTP codes are valid only ±30s (valid_window=1). Replay is useless — intercepting the chat approval gives an attacker nothing reusable.</a:t>
             </a:r>
             <a:endParaRPr b="0" i="0" sz="850" u="none" cap="none" strike="noStrike">
               <a:solidFill>
@@ -15539,7 +15553,7 @@
                 <a:cs typeface="Calibri"/>
                 <a:sym typeface="Calibri"/>
               </a:rPr>
-              <a:t>Each approval code is tied to a specific 4-char incident key — approving #k42a cannot accidentally execute #bgy4.</a:t>
+              <a:t>Each approval names a specific 4-char incident key — approving k42a cannot accidentally execute the command stored under bgy4.</a:t>
             </a:r>
             <a:endParaRPr b="0" i="0" sz="850" u="none" cap="none" strike="noStrike">
               <a:solidFill>
@@ -15784,7 +15798,7 @@
                 <a:cs typeface="Calibri"/>
                 <a:sym typeface="Calibri"/>
               </a:rPr>
-              <a:t>approvedBy + timestamp stored in SQLite. Full audit trail: who approved what, when, from which incident.</a:t>
+              <a:t>MCP logs AUDIT | WRITE_EXECUTED | approved_by | command | timestamp, and SQLite stores key, command, status, created_at, resolved_at.</a:t>
             </a:r>
             <a:endParaRPr b="0" i="0" sz="850" u="none" cap="none" strike="noStrike">
               <a:solidFill>
@@ -16029,7 +16043,7 @@
                 <a:cs typeface="Calibri"/>
                 <a:sym typeface="Calibri"/>
               </a:rPr>
-              <a:t>Once an incident is marked resolved, the system blocks re-execution. Same command cannot be approved twice.</a:t>
+              <a:t>Once an incident is PATCHed to resolved (resolved_at set), it is closed. The approval flow will not re-run a resolved incident.</a:t>
             </a:r>
             <a:endParaRPr b="0" i="0" sz="850" u="none" cap="none" strike="noStrike">
               <a:solidFill>
@@ -16274,7 +16288,7 @@
                 <a:cs typeface="Calibri"/>
                 <a:sym typeface="Calibri"/>
               </a:rPr>
-              <a:t>kubectl_read is always free. kubectl_write requires TOTP. The gate only applies to destructive operations.</a:t>
+              <a:t>kubectl-read &amp; promql are always free; kubectl-write requires a TOTP. The gate applies only to destructive operations.</a:t>
             </a:r>
             <a:endParaRPr b="0" i="0" sz="850" u="none" cap="none" strike="noStrike">
               <a:solidFill>
@@ -16519,7 +16533,7 @@
                 <a:cs typeface="Calibri"/>
                 <a:sym typeface="Calibri"/>
               </a:rPr>
-              <a:t>Every execution visible in dashboard incident audit panel. CLEAR for test cleanup, persistent for production review.</a:t>
+              <a:t>Every incident is visible in the dashboard audit panel (GET /incidents). DELETE /incidents clears them for the next workshop run.</a:t>
             </a:r>
             <a:endParaRPr b="0" i="0" sz="850" u="none" cap="none" strike="noStrike">
               <a:solidFill>
@@ -16663,7 +16677,7 @@
                 <a:cs typeface="Consolas"/>
                 <a:sym typeface="Consolas"/>
               </a:rPr>
-              <a:t>SECURITY — TOPIC 5</a:t>
+              <a:t>SECURITY — LAYER 5</a:t>
             </a:r>
             <a:endParaRPr b="0" i="0" sz="1000" u="none" cap="none" strike="noStrike">
               <a:solidFill>
@@ -16726,7 +16740,7 @@
                 <a:cs typeface="Trebuchet MS"/>
                 <a:sym typeface="Trebuchet MS"/>
               </a:rPr>
-              <a:t>Network Security &amp; Isolation</a:t>
+              <a:t>Secrets as K8s Secrets + JWT Path</a:t>
             </a:r>
             <a:endParaRPr b="0" i="0" sz="3600" u="none" cap="none" strike="noStrike">
               <a:solidFill>
@@ -16920,7 +16934,7 @@
                 <a:cs typeface="Trebuchet MS"/>
                 <a:sym typeface="Trebuchet MS"/>
               </a:rPr>
-              <a:t>INTERNET</a:t>
+              <a:t>NOT IN CODE, NOT IN .env</a:t>
             </a:r>
             <a:endParaRPr b="0" i="0" sz="900" u="none" cap="none" strike="noStrike">
               <a:solidFill>
@@ -16983,7 +16997,7 @@
                 <a:cs typeface="Calibri"/>
                 <a:sym typeface="Calibri"/>
               </a:rPr>
-              <a:t>Attacker   •   Telegram servers   •   Alertmanager (via ngrok HTTPS)</a:t>
+              <a:t>TOTP_SECRET + WRITE_APPROVAL_TOKEN live in a K8s Secret (mcp-secrets), injected as env via secretKeyRef.</a:t>
             </a:r>
             <a:endParaRPr b="0" i="0" sz="850" u="none" cap="none" strike="noStrike">
               <a:solidFill>
@@ -17151,7 +17165,7 @@
                 <a:cs typeface="Trebuchet MS"/>
                 <a:sym typeface="Trebuchet MS"/>
               </a:rPr>
-              <a:t>ngrok HTTPS TUNNEL</a:t>
+              <a:t>GEMINI API KEY</a:t>
             </a:r>
             <a:endParaRPr b="0" i="0" sz="900" u="none" cap="none" strike="noStrike">
               <a:solidFill>
@@ -17214,7 +17228,7 @@
                 <a:cs typeface="Calibri"/>
                 <a:sym typeface="Calibri"/>
               </a:rPr>
-              <a:t>TLS termination   •   Static domain   •   Port 443 only</a:t>
+              <a:t>Stored as an encrypted n8n credential (AES-256 at rest). Never in node params, never exported with the workflow JSON.</a:t>
             </a:r>
             <a:endParaRPr b="0" i="0" sz="850" u="none" cap="none" strike="noStrike">
               <a:solidFill>
@@ -17382,7 +17396,7 @@
                 <a:cs typeface="Trebuchet MS"/>
                 <a:sym typeface="Trebuchet MS"/>
               </a:rPr>
-              <a:t>EC2 INSTANCE</a:t>
+              <a:t>INSIDE THE CLUSTER</a:t>
             </a:r>
             <a:endParaRPr b="0" i="0" sz="900" u="none" cap="none" strike="noStrike">
               <a:solidFill>
@@ -17445,7 +17459,7 @@
                 <a:cs typeface="Calibri"/>
                 <a:sym typeface="Calibri"/>
               </a:rPr>
-              <a:t>n8n :5678 (Docker)   •   MCP :8000 (Docker, internal only)   •   Port 5678 should be reverse-proxied in prod</a:t>
+              <a:t>All service-to-service calls use in-cluster DNS (svc.cluster.local). MCP :8000 is a ClusterIP — not exposed to the internet.</a:t>
             </a:r>
             <a:endParaRPr b="0" i="0" sz="850" u="none" cap="none" strike="noStrike">
               <a:solidFill>
@@ -17613,7 +17627,7 @@
                 <a:cs typeface="Trebuchet MS"/>
                 <a:sym typeface="Trebuchet MS"/>
               </a:rPr>
-              <a:t>KUBERNETES CLUSTER</a:t>
+              <a:t>EVENT-WATCHER → n8n  (JWT)</a:t>
             </a:r>
             <a:endParaRPr b="0" i="0" sz="900" u="none" cap="none" strike="noStrike">
               <a:solidFill>
@@ -17676,7 +17690,7 @@
                 <a:cs typeface="Calibri"/>
                 <a:sym typeface="Calibri"/>
               </a:rPr>
-              <a:t>Dashboard LB (port 80, public)   •   Prometheus/Grafana/Alertmanager LBs   •   target-app NodePort (workshop only)</a:t>
+              <a:t>The k8s-event-s8 path is signed with an HS256 JWT (JWT_SECRET, 30s exp). n8n verifies the Bearer token before acting.</a:t>
             </a:r>
             <a:endParaRPr b="0" i="0" sz="850" u="none" cap="none" strike="noStrike">
               <a:solidFill>
@@ -17844,7 +17858,7 @@
                 <a:cs typeface="Trebuchet MS"/>
                 <a:sym typeface="Trebuchet MS"/>
               </a:rPr>
-              <a:t>🛡️  PROD HARDENING</a:t>
+              <a:t>🔑  SECRET HYGIENE</a:t>
             </a:r>
             <a:endParaRPr b="0" i="0" sz="1100" u="none" cap="none" strike="noStrike">
               <a:solidFill>
@@ -17970,7 +17984,7 @@
                 <a:cs typeface="Trebuchet MS"/>
                 <a:sym typeface="Trebuchet MS"/>
               </a:rPr>
-              <a:t>Reverse proxy n8n:</a:t>
+              <a:t>K8s Secrets, not files:</a:t>
             </a:r>
             <a:endParaRPr b="0" i="0" sz="900" u="none" cap="none" strike="noStrike">
               <a:solidFill>
@@ -18033,7 +18047,7 @@
                 <a:cs typeface="Calibri"/>
                 <a:sym typeface="Calibri"/>
               </a:rPr>
-              <a:t>nginx/Traefik in front of :5678. Add SSL, rate limiting, IP allowlist.</a:t>
+              <a:t>TOTP_SECRET injected from mcp-secrets via secretKeyRef — never on disk, never committed. secret.yaml is a template only.</a:t>
             </a:r>
             <a:endParaRPr b="0" i="0" sz="850" u="none" cap="none" strike="noStrike">
               <a:solidFill>
@@ -18159,7 +18173,7 @@
                 <a:cs typeface="Trebuchet MS"/>
                 <a:sym typeface="Trebuchet MS"/>
               </a:rPr>
-              <a:t>MCP not public:</a:t>
+              <a:t>TOTP generated in-pod:</a:t>
             </a:r>
             <a:endParaRPr b="0" i="0" sz="900" u="none" cap="none" strike="noStrike">
               <a:solidFill>
@@ -18222,7 +18236,7 @@
                 <a:cs typeface="Calibri"/>
                 <a:sym typeface="Calibri"/>
               </a:rPr>
-              <a:t>mcp-server:8000 only reachable from Docker network. Never expose to internet.</a:t>
+              <a:t>pyotp.random_base32() runs inside the MCP pod. Rollout-restart mcp-server after rotating the secret.</a:t>
             </a:r>
             <a:endParaRPr b="0" i="0" sz="850" u="none" cap="none" strike="noStrike">
               <a:solidFill>
@@ -18348,7 +18362,7 @@
                 <a:cs typeface="Trebuchet MS"/>
                 <a:sym typeface="Trebuchet MS"/>
               </a:rPr>
-              <a:t>K8s RBAC:</a:t>
+              <a:t>Gemini key encrypted:</a:t>
             </a:r>
             <a:endParaRPr b="0" i="0" sz="900" u="none" cap="none" strike="noStrike">
               <a:solidFill>
@@ -18411,7 +18425,7 @@
                 <a:cs typeface="Calibri"/>
                 <a:sym typeface="Calibri"/>
               </a:rPr>
-              <a:t>kubeconfig scoped to workshop namespace. No cluster-admin. Least privilege.</a:t>
+              <a:t>Lives in n8n credential store (AES-256). Workflow JSON exports only the credential ID, never the secret.</a:t>
             </a:r>
             <a:endParaRPr b="0" i="0" sz="850" u="none" cap="none" strike="noStrike">
               <a:solidFill>
@@ -18537,7 +18551,7 @@
                 <a:cs typeface="Trebuchet MS"/>
                 <a:sym typeface="Trebuchet MS"/>
               </a:rPr>
-              <a:t>Rotate secrets:</a:t>
+              <a:t>JWT is HS256, short-lived:</a:t>
             </a:r>
             <a:endParaRPr b="0" i="0" sz="900" u="none" cap="none" strike="noStrike">
               <a:solidFill>
@@ -18600,7 +18614,7 @@
                 <a:cs typeface="Calibri"/>
                 <a:sym typeface="Calibri"/>
               </a:rPr>
-              <a:t>TOTP_SECRET, WRITE_APPROVAL_TOKEN, N8N_KEY rotated each session.</a:t>
+              <a:t>event-watcher signs claims with JWT_SECRET; exp = iat + 30s. n8n rejects an expired or unsigned token.</a:t>
             </a:r>
             <a:endParaRPr b="0" i="0" sz="850" u="none" cap="none" strike="noStrike">
               <a:solidFill>
@@ -18726,7 +18740,7 @@
                 <a:cs typeface="Trebuchet MS"/>
                 <a:sym typeface="Trebuchet MS"/>
               </a:rPr>
-              <a:t>Execution logging:</a:t>
+              <a:t>Rotate between sessions:</a:t>
             </a:r>
             <a:endParaRPr b="0" i="0" sz="900" u="none" cap="none" strike="noStrike">
               <a:solidFill>
@@ -18789,7 +18803,7 @@
                 <a:cs typeface="Calibri"/>
                 <a:sym typeface="Calibri"/>
               </a:rPr>
-              <a:t>n8n saves all executions. Review for unexpected workflow triggers.</a:t>
+              <a:t>Regenerate TOTP_SECRET / JWT_SECRET per workshop. The repo ships placeholders, never real values.</a:t>
             </a:r>
             <a:endParaRPr b="0" i="0" sz="850" u="none" cap="none" strike="noStrike">
               <a:solidFill>
@@ -18908,7 +18922,7 @@
                 <a:cs typeface="Trebuchet MS"/>
                 <a:sym typeface="Trebuchet MS"/>
               </a:rPr>
-              <a:t>🐳  Docker Network Isolation</a:t>
+              <a:t>🔒  In-Cluster Networking</a:t>
             </a:r>
             <a:endParaRPr b="0" i="0" sz="1000" u="none" cap="none" strike="noStrike">
               <a:solidFill>
@@ -18971,7 +18985,7 @@
                 <a:cs typeface="Calibri"/>
                 <a:sym typeface="Calibri"/>
               </a:rPr>
-              <a:t>n8n → mcp-server via internal Docker DNS (never leaves the host)</a:t>
+              <a:t>n8n → mcp-server over ClusterIP DNS — traffic never leaves the cluster.</a:t>
             </a:r>
             <a:endParaRPr b="0" i="0" sz="850" u="none" cap="none" strike="noStrike">
               <a:solidFill>
@@ -19008,7 +19022,7 @@
                 <a:cs typeface="Calibri"/>
                 <a:sym typeface="Calibri"/>
               </a:rPr>
-              <a:t>External traffic cannot reach mcp-server:8000 directly — only n8n can</a:t>
+              <a:t>Only the ingress LB is public; MCP &amp; monitoring stay ClusterIP-only.</a:t>
             </a:r>
             <a:endParaRPr b="0" i="0" sz="850" u="none" cap="none" strike="noStrike">
               <a:solidFill>
@@ -19071,7 +19085,7 @@
                 <a:cs typeface="Calibri"/>
                 <a:sym typeface="Calibri"/>
               </a:rPr>
-              <a:t>⚠️  In this workshop EC2 port 8000 IS open for demo purposes — close it in production</a:t>
+              <a:t>⚠️  The repo ships only secret TEMPLATES (INJECT_* placeholders). Real TOTP/JWT values are generated at bootstrap, never committed.</a:t>
             </a:r>
             <a:endParaRPr b="0" i="0" sz="900" u="none" cap="none" strike="noStrike">
               <a:solidFill>
@@ -19215,7 +19229,7 @@
                 <a:cs typeface="Consolas"/>
                 <a:sym typeface="Consolas"/>
               </a:rPr>
-              <a:t>SECURITY — TOPIC 6</a:t>
+              <a:t>SECURITY — LAYER 6</a:t>
             </a:r>
             <a:endParaRPr b="0" i="0" sz="1000" u="none" cap="none" strike="noStrike">
               <a:solidFill>
@@ -19665,7 +19679,7 @@
                 <a:cs typeface="Calibri"/>
                 <a:sym typeface="Calibri"/>
               </a:rPr>
-              <a:t>✅ Always gate write operations behind human approval. Use S4's TOTP pattern.</a:t>
+              <a:t>✅ Gate every write behind a human + TOTP — the Human Approval pattern. The AI recommends; a person approves.</a:t>
             </a:r>
             <a:endParaRPr b="0" i="0" sz="800" u="none" cap="none" strike="noStrike">
               <a:solidFill>
@@ -19963,7 +19977,7 @@
                 <a:cs typeface="Calibri"/>
                 <a:sym typeface="Calibri"/>
               </a:rPr>
-              <a:t>❌ Hardcode API keys, tokens, IPs in node parameters → exported with workflow → committed to git</a:t>
+              <a:t>❌ Hardcode API keys / tokens in node params → exported with the workflow JSON → committed to git</a:t>
             </a:r>
             <a:endParaRPr b="0" i="0" sz="800" u="none" cap="none" strike="noStrike">
               <a:solidFill>
@@ -20026,7 +20040,7 @@
                 <a:cs typeface="Calibri"/>
                 <a:sym typeface="Calibri"/>
               </a:rPr>
-              <a:t>✅ Store in n8n credentials or .env. They are excluded from workflow exports.</a:t>
+              <a:t>✅ Use n8n credentials (AES-256) or K8s Secrets. Exports carry only credential IDs, never the secret.</a:t>
             </a:r>
             <a:endParaRPr b="0" i="0" sz="800" u="none" cap="none" strike="noStrike">
               <a:solidFill>
@@ -20324,7 +20338,7 @@
                 <a:cs typeface="Calibri"/>
                 <a:sym typeface="Calibri"/>
               </a:rPr>
-              <a:t>❌ Plain http:// webhook URL with no auth header → anyone can trigger workflow from internet</a:t>
+              <a:t>❌ Expose an unauthenticated webhook to the internet → anyone who finds the URL can trigger the workflow</a:t>
             </a:r>
             <a:endParaRPr b="0" i="0" sz="800" u="none" cap="none" strike="noStrike">
               <a:solidFill>
@@ -20387,7 +20401,7 @@
                 <a:cs typeface="Calibri"/>
                 <a:sym typeface="Calibri"/>
               </a:rPr>
-              <a:t>✅ Add header auth or JWT on every webhook. Use HTTPS via ngrok always.</a:t>
+              <a:t>✅ Keep webhooks in-cluster (ClusterIP); sign external calls with a short-lived JWT (the event-watcher path).</a:t>
             </a:r>
             <a:endParaRPr b="0" i="0" sz="800" u="none" cap="none" strike="noStrike">
               <a:solidFill>
@@ -20685,7 +20699,7 @@
                 <a:cs typeface="Calibri"/>
                 <a:sym typeface="Calibri"/>
               </a:rPr>
-              <a:t>❌ n8n saves all execution data including node inputs/outputs — tokens visible in execution history</a:t>
+              <a:t>❌ n8n saves execution data (node inputs/outputs) → an approval TOTP or token could surface in history</a:t>
             </a:r>
             <a:endParaRPr b="0" i="0" sz="800" u="none" cap="none" strike="noStrike">
               <a:solidFill>
@@ -20748,7 +20762,7 @@
                 <a:cs typeface="Calibri"/>
                 <a:sym typeface="Calibri"/>
               </a:rPr>
-              <a:t>✅ Set saveDataSuccessExecution/saveDataErrorExecution carefully. Mask sensitive fields.</a:t>
+              <a:t>✅ Tune saveDataSuccessExecution / saveDataErrorExecution. TOTP helps: a logged code is already expired.</a:t>
             </a:r>
             <a:endParaRPr b="0" i="0" sz="800" u="none" cap="none" strike="noStrike">
               <a:solidFill>
@@ -21046,7 +21060,7 @@
                 <a:cs typeface="Calibri"/>
                 <a:sym typeface="Calibri"/>
               </a:rPr>
-              <a:t>❌ WRITE_APPROVAL_TOKEN set once, never rotated → if leaked, attacker has permanent write access</a:t>
+              <a:t>❌ Rely on a static WRITE_APPROVAL_TOKEN → if leaked, an attacker has permanent write access</a:t>
             </a:r>
             <a:endParaRPr b="0" i="0" sz="800" u="none" cap="none" strike="noStrike">
               <a:solidFill>
@@ -21109,7 +21123,7 @@
                 <a:cs typeface="Calibri"/>
                 <a:sym typeface="Calibri"/>
               </a:rPr>
-              <a:t>✅ Use TOTP (expires 30s) as primary. Rotate WRITE_APPROVAL_TOKEN between sessions.</a:t>
+              <a:t>✅ Use TOTP (±30s) as primary — the static token is fallback only. Rotate the secret between sessions.</a:t>
             </a:r>
             <a:endParaRPr b="0" i="0" sz="800" u="none" cap="none" strike="noStrike">
               <a:solidFill>
@@ -21407,7 +21421,7 @@
                 <a:cs typeface="Calibri"/>
                 <a:sym typeface="Calibri"/>
               </a:rPr>
-              <a:t>❌ cluster-admin kubeconfig in MCP server → kubectl-read could escalate to delete namespaces</a:t>
+              <a:t>❌ Give the MCP a cluster-admin kubeconfig → a single bug could delete namespaces or read every Secret</a:t>
             </a:r>
             <a:endParaRPr b="0" i="0" sz="800" u="none" cap="none" strike="noStrike">
               <a:solidFill>
@@ -21470,7 +21484,7 @@
                 <a:cs typeface="Calibri"/>
                 <a:sym typeface="Calibri"/>
               </a:rPr>
-              <a:t>✅ Namespace-scoped kubeconfig for workshop only. Separate kubeconfig for write vs read.</a:t>
+              <a:t>✅ Use an in-cluster ServiceAccount: read-only verbs cluster-wide, write limited to patch/update + pod delete.</a:t>
             </a:r>
             <a:endParaRPr b="0" i="0" sz="800" u="none" cap="none" strike="noStrike">
               <a:solidFill>
